--- a/courseware/202611_ADS_W10_Intervals_DP_Intro.pptx
+++ b/courseware/202611_ADS_W10_Intervals_DP_Intro.pptx
@@ -13035,18 +13035,7 @@
                 <a:ea typeface="Consolas" pitchFamily="34" charset="-122"/>
                 <a:cs typeface="Consolas" pitchFamily="34" charset="-120"/>
               </a:rPr>
-              <a:t>print('暴力枚举 :', brute_odd(TRI))     </a:t>
-            </a:r>
-            <a:r>
-              <a:rPr lang="en-US" sz="960" dirty="0">
-                <a:solidFill>
-                  <a:srgbClr val="7C8F87"/>
-                </a:solidFill>
-                <a:latin typeface="Consolas" pitchFamily="34" charset="0"/>
-                <a:ea typeface="Consolas" pitchFamily="34" charset="-122"/>
-                <a:cs typeface="Consolas" pitchFamily="34" charset="-120"/>
-              </a:rPr>
-              <a:t># 17</a:t>
+              <a:t>print('暴力枚举 :', brute_odd(TRI))</a:t>
             </a:r>
             <a:endParaRPr lang="en-US" sz="960" dirty="0"/>
           </a:p>
@@ -13097,18 +13086,7 @@
                 <a:ea typeface="Consolas" pitchFamily="34" charset="-122"/>
                 <a:cs typeface="Consolas" pitchFamily="34" charset="-120"/>
               </a:rPr>
-              <a:t>print('补一维后 :', fixed_odd(TRI))     </a:t>
-            </a:r>
-            <a:r>
-              <a:rPr lang="en-US" sz="960" dirty="0">
-                <a:solidFill>
-                  <a:srgbClr val="7C8F87"/>
-                </a:solidFill>
-                <a:latin typeface="Consolas" pitchFamily="34" charset="0"/>
-                <a:ea typeface="Consolas" pitchFamily="34" charset="-122"/>
-                <a:cs typeface="Consolas" pitchFamily="34" charset="-120"/>
-              </a:rPr>
-              <a:t># 17</a:t>
+              <a:t>print('补一维后 :', fixed_odd(TRI))</a:t>
             </a:r>
             <a:endParaRPr lang="en-US" sz="960" dirty="0"/>
           </a:p>
